--- a/temp/files/T6-temp.pptx
+++ b/temp/files/T6-temp.pptx
@@ -5204,8 +5204,8 @@
         </p:blipFill>
         <p:spPr>
           <a:xfrm>
-            <a:off x="10180065" y="3169840"/>
-            <a:ext cx="1356326" cy="1127731"/>
+            <a:off x="9799074" y="3169840"/>
+            <a:ext cx="1737316" cy="1127731"/>
           </a:xfrm>
           <a:prstGeom prst="rect">
             <a:avLst/>
